--- a/reports/stage20/presentations/02_PHAT_TRIEN_UNG_DUNG_DI_DONG_WORKSPHERE.pptx
+++ b/reports/stage20/presentations/02_PHAT_TRIEN_UNG_DUNG_DI_DONG_WORKSPHERE.pptx
@@ -533,7 +533,7 @@
           <a:p/>
           <a:p>
             <a:r>
-              <a:t>THỜI LƯỢNG DỰ KIẾN: 1 phút (PROJECT_PROPOSAL)</a:t>
+              <a:t>THỜI LƯỢNG DỰ KIẾN: 20 giây (~0.3 phút) (PROJECT_PROPOSAL)</a:t>
             </a:r>
           </a:p>
           <a:p>
@@ -645,7 +645,7 @@
           <a:p/>
           <a:p>
             <a:r>
-              <a:t>THỜI LƯỢNG DỰ KIẾN: 1.5 phút (PROJECT_PROPOSAL)</a:t>
+              <a:t>THỜI LƯỢNG DỰ KIẾN: 60 giây (~1.0 phút) (PROJECT_PROPOSAL)</a:t>
             </a:r>
           </a:p>
           <a:p>
@@ -757,7 +757,7 @@
           <a:p/>
           <a:p>
             <a:r>
-              <a:t>THỜI LƯỢNG DỰ KIẾN: 1.5 phút (PROJECT_PROPOSAL)</a:t>
+              <a:t>THỜI LƯỢNG DỰ KIẾN: 60 giây (~1.0 phút) (PROJECT_PROPOSAL)</a:t>
             </a:r>
           </a:p>
           <a:p>
@@ -869,7 +869,7 @@
           <a:p/>
           <a:p>
             <a:r>
-              <a:t>THỜI LƯỢNG DỰ KIẾN: 1.5 phút (PROJECT_PROPOSAL)</a:t>
+              <a:t>THỜI LƯỢNG DỰ KIẾN: 70 giây (~1.2 phút) (PROJECT_PROPOSAL)</a:t>
             </a:r>
           </a:p>
           <a:p>
@@ -981,7 +981,7 @@
           <a:p/>
           <a:p>
             <a:r>
-              <a:t>THỜI LƯỢNG DỰ KIẾN: 1.5 phút (PROJECT_PROPOSAL)</a:t>
+              <a:t>THỜI LƯỢNG DỰ KIẾN: 65 giây (~1.1 phút) (PROJECT_PROPOSAL)</a:t>
             </a:r>
           </a:p>
           <a:p>
@@ -1093,7 +1093,7 @@
           <a:p/>
           <a:p>
             <a:r>
-              <a:t>THỜI LƯỢNG DỰ KIẾN: 1.5 phút (PROJECT_PROPOSAL)</a:t>
+              <a:t>THỜI LƯỢNG DỰ KIẾN: 45 giây (~0.8 phút) (PROJECT_PROPOSAL)</a:t>
             </a:r>
           </a:p>
           <a:p>
@@ -1205,7 +1205,7 @@
           <a:p/>
           <a:p>
             <a:r>
-              <a:t>THỜI LƯỢNG DỰ KIẾN: 1 phút (PROJECT_PROPOSAL)</a:t>
+              <a:t>THỜI LƯỢNG DỰ KIẾN: 30 giây (~0.5 phút) (PROJECT_PROPOSAL)</a:t>
             </a:r>
           </a:p>
           <a:p>
@@ -1317,7 +1317,7 @@
           <a:p/>
           <a:p>
             <a:r>
-              <a:t>THỜI LƯỢNG DỰ KIẾN: 1.5 phút (PROJECT_PROPOSAL)</a:t>
+              <a:t>THỜI LƯỢNG DỰ KIẾN: 45 giây (~0.8 phút) (PROJECT_PROPOSAL)</a:t>
             </a:r>
           </a:p>
           <a:p>
@@ -1429,7 +1429,7 @@
           <a:p/>
           <a:p>
             <a:r>
-              <a:t>THỜI LƯỢNG DỰ KIẾN: 1.5 phút (PROJECT_PROPOSAL)</a:t>
+              <a:t>THỜI LƯỢNG DỰ KIẾN: 60 giây (~1.0 phút) (PROJECT_PROPOSAL)</a:t>
             </a:r>
           </a:p>
           <a:p>
@@ -1541,7 +1541,7 @@
           <a:p/>
           <a:p>
             <a:r>
-              <a:t>THỜI LƯỢNG DỰ KIẾN: 1.5 phút (PROJECT_PROPOSAL)</a:t>
+              <a:t>THỜI LƯỢNG DỰ KIẾN: 55 giây (~0.9 phút) (PROJECT_PROPOSAL)</a:t>
             </a:r>
           </a:p>
           <a:p>
@@ -1653,7 +1653,7 @@
           <a:p/>
           <a:p>
             <a:r>
-              <a:t>THỜI LƯỢNG DỰ KIẾN: 1.5 phút (PROJECT_PROPOSAL)</a:t>
+              <a:t>THỜI LƯỢNG DỰ KIẾN: 75 giây (~1.2 phút) (PROJECT_PROPOSAL)</a:t>
             </a:r>
           </a:p>
           <a:p>
@@ -1765,7 +1765,7 @@
           <a:p/>
           <a:p>
             <a:r>
-              <a:t>THỜI LƯỢNG DỰ KIẾN: 1.5 phút (PROJECT_PROPOSAL)</a:t>
+              <a:t>THỜI LƯỢNG DỰ KIẾN: 75 giây (~1.2 phút) (PROJECT_PROPOSAL)</a:t>
             </a:r>
           </a:p>
           <a:p>
@@ -1877,7 +1877,7 @@
           <a:p/>
           <a:p>
             <a:r>
-              <a:t>THỜI LƯỢNG DỰ KIẾN: 1.5 phút (PROJECT_PROPOSAL)</a:t>
+              <a:t>THỜI LƯỢNG DỰ KIẾN: 65 giây (~1.1 phút) (PROJECT_PROPOSAL)</a:t>
             </a:r>
           </a:p>
           <a:p>
@@ -1989,7 +1989,7 @@
           <a:p/>
           <a:p>
             <a:r>
-              <a:t>THỜI LƯỢNG DỰ KIẾN: 1.5 phút (PROJECT_PROPOSAL)</a:t>
+              <a:t>THỜI LƯỢNG DỰ KIẾN: 75 giây (~1.2 phút) (PROJECT_PROPOSAL)</a:t>
             </a:r>
           </a:p>
           <a:p>
@@ -2101,7 +2101,7 @@
           <a:p/>
           <a:p>
             <a:r>
-              <a:t>THỜI LƯỢNG DỰ KIẾN: 1.5 phút (PROJECT_PROPOSAL)</a:t>
+              <a:t>THỜI LƯỢNG DỰ KIẾN: 75 giây (~1.2 phút) (PROJECT_PROPOSAL)</a:t>
             </a:r>
           </a:p>
           <a:p>

--- a/reports/stage20/presentations/02_PHAT_TRIEN_UNG_DUNG_DI_DONG_WORKSPHERE.pptx
+++ b/reports/stage20/presentations/02_PHAT_TRIEN_UNG_DUNG_DI_DONG_WORKSPHERE.pptx
@@ -1535,7 +1535,7 @@
           </a:p>
           <a:p>
             <a:r>
-              <a:t>WorkSphere Mobile được xây dựng trên React Native 0.88 và React 19 mới nhất, kết hợp 100% TypeScript. Nhóm sử dụng React Navigation 7 để điều phối màn hình và phân định rạch ròi cơ chế lưu trữ bảo mật bằng Keychain cho token nhạy cảm.</a:t>
+              <a:t>WorkSphere Mobile được xây dựng trên React Native 0.88 và React 19 mới nhất, kết hợp TypeScript (mobile/src). Nhóm sử dụng React Navigation 7 để điều phối màn hình và phân định rạch ròi cơ chế lưu trữ bảo mật bằng Keychain cho token nhạy cảm.</a:t>
             </a:r>
           </a:p>
           <a:p/>

--- a/reports/stage20/presentations/02_PHAT_TRIEN_UNG_DUNG_DI_DONG_WORKSPHERE.pptx
+++ b/reports/stage20/presentations/02_PHAT_TRIEN_UNG_DUNG_DI_DONG_WORKSPHERE.pptx
@@ -645,7 +645,7 @@
           <a:p/>
           <a:p>
             <a:r>
-              <a:t>THỜI LƯỢNG DỰ KIẾN: 60 giây (~1.0 phút) (PROJECT_PROPOSAL)</a:t>
+              <a:t>THỜI LƯỢNG DỰ KIẾN: 50 giây (~0.8 phút) (PROJECT_PROPOSAL)</a:t>
             </a:r>
           </a:p>
           <a:p>
@@ -757,7 +757,7 @@
           <a:p/>
           <a:p>
             <a:r>
-              <a:t>THỜI LƯỢNG DỰ KIẾN: 60 giây (~1.0 phút) (PROJECT_PROPOSAL)</a:t>
+              <a:t>THỜI LƯỢNG DỰ KIẾN: 50 giây (~0.8 phút) (PROJECT_PROPOSAL)</a:t>
             </a:r>
           </a:p>
           <a:p>
@@ -869,7 +869,7 @@
           <a:p/>
           <a:p>
             <a:r>
-              <a:t>THỜI LƯỢNG DỰ KIẾN: 70 giây (~1.2 phút) (PROJECT_PROPOSAL)</a:t>
+              <a:t>THỜI LƯỢNG DỰ KIẾN: 60 giây (~1.0 phút) (PROJECT_PROPOSAL)</a:t>
             </a:r>
           </a:p>
           <a:p>
@@ -981,7 +981,7 @@
           <a:p/>
           <a:p>
             <a:r>
-              <a:t>THỜI LƯỢNG DỰ KIẾN: 65 giây (~1.1 phút) (PROJECT_PROPOSAL)</a:t>
+              <a:t>THỜI LƯỢNG DỰ KIẾN: 55 giây (~0.9 phút) (PROJECT_PROPOSAL)</a:t>
             </a:r>
           </a:p>
           <a:p>
@@ -1093,7 +1093,7 @@
           <a:p/>
           <a:p>
             <a:r>
-              <a:t>THỜI LƯỢNG DỰ KIẾN: 45 giây (~0.8 phút) (PROJECT_PROPOSAL)</a:t>
+              <a:t>THỜI LƯỢNG DỰ KIẾN: 40 giây (~0.7 phút) (PROJECT_PROPOSAL)</a:t>
             </a:r>
           </a:p>
           <a:p>
@@ -1205,7 +1205,7 @@
           <a:p/>
           <a:p>
             <a:r>
-              <a:t>THỜI LƯỢNG DỰ KIẾN: 30 giây (~0.5 phút) (PROJECT_PROPOSAL)</a:t>
+              <a:t>THỜI LƯỢNG DỰ KIẾN: 25 giây (~0.4 phút) (PROJECT_PROPOSAL)</a:t>
             </a:r>
           </a:p>
           <a:p>
@@ -1317,7 +1317,7 @@
           <a:p/>
           <a:p>
             <a:r>
-              <a:t>THỜI LƯỢNG DỰ KIẾN: 45 giây (~0.8 phút) (PROJECT_PROPOSAL)</a:t>
+              <a:t>THỜI LƯỢNG DỰ KIẾN: 40 giây (~0.7 phút) (PROJECT_PROPOSAL)</a:t>
             </a:r>
           </a:p>
           <a:p>
@@ -1429,7 +1429,7 @@
           <a:p/>
           <a:p>
             <a:r>
-              <a:t>THỜI LƯỢNG DỰ KIẾN: 60 giây (~1.0 phút) (PROJECT_PROPOSAL)</a:t>
+              <a:t>THỜI LƯỢNG DỰ KIẾN: 50 giây (~0.8 phút) (PROJECT_PROPOSAL)</a:t>
             </a:r>
           </a:p>
           <a:p>
@@ -1541,7 +1541,7 @@
           <a:p/>
           <a:p>
             <a:r>
-              <a:t>THỜI LƯỢNG DỰ KIẾN: 55 giây (~0.9 phút) (PROJECT_PROPOSAL)</a:t>
+              <a:t>THỜI LƯỢNG DỰ KIẾN: 50 giây (~0.8 phút) (PROJECT_PROPOSAL)</a:t>
             </a:r>
           </a:p>
           <a:p>
@@ -1653,7 +1653,7 @@
           <a:p/>
           <a:p>
             <a:r>
-              <a:t>THỜI LƯỢNG DỰ KIẾN: 75 giây (~1.2 phút) (PROJECT_PROPOSAL)</a:t>
+              <a:t>THỜI LƯỢNG DỰ KIẾN: 65 giây (~1.1 phút) (PROJECT_PROPOSAL)</a:t>
             </a:r>
           </a:p>
           <a:p>
@@ -1765,7 +1765,7 @@
           <a:p/>
           <a:p>
             <a:r>
-              <a:t>THỜI LƯỢNG DỰ KIẾN: 75 giây (~1.2 phút) (PROJECT_PROPOSAL)</a:t>
+              <a:t>THỜI LƯỢNG DỰ KIẾN: 65 giây (~1.1 phút) (PROJECT_PROPOSAL)</a:t>
             </a:r>
           </a:p>
           <a:p>
@@ -1877,7 +1877,7 @@
           <a:p/>
           <a:p>
             <a:r>
-              <a:t>THỜI LƯỢNG DỰ KIẾN: 65 giây (~1.1 phút) (PROJECT_PROPOSAL)</a:t>
+              <a:t>THỜI LƯỢNG DỰ KIẾN: 55 giây (~0.9 phút) (PROJECT_PROPOSAL)</a:t>
             </a:r>
           </a:p>
           <a:p>
@@ -1989,7 +1989,7 @@
           <a:p/>
           <a:p>
             <a:r>
-              <a:t>THỜI LƯỢNG DỰ KIẾN: 75 giây (~1.2 phút) (PROJECT_PROPOSAL)</a:t>
+              <a:t>THỜI LƯỢNG DỰ KIẾN: 65 giây (~1.1 phút) (PROJECT_PROPOSAL)</a:t>
             </a:r>
           </a:p>
           <a:p>
@@ -2101,7 +2101,7 @@
           <a:p/>
           <a:p>
             <a:r>
-              <a:t>THỜI LƯỢNG DỰ KIẾN: 75 giây (~1.2 phút) (PROJECT_PROPOSAL)</a:t>
+              <a:t>THỜI LƯỢNG DỰ KIẾN: 65 giây (~1.1 phút) (PROJECT_PROPOSAL)</a:t>
             </a:r>
           </a:p>
           <a:p>
